--- a/docs/CleanArchitecture-Execution-Flow.pptx
+++ b/docs/CleanArchitecture-Execution-Flow.pptx
@@ -8124,7 +8124,7 @@
         <p:spPr>
           <a:xfrm>
             <a:off x="76200" y="76200"/>
-            <a:ext cx="12039600" cy="1104900"/>
+            <a:ext cx="12039600" cy="1163876"/>
           </a:xfrm>
           <a:prstGeom prst="roundRect">
             <a:avLst>
@@ -8163,8 +8163,8 @@
         </p:nvSpPr>
         <p:spPr>
           <a:xfrm>
-            <a:off x="133350" y="133349"/>
-            <a:ext cx="1645920" cy="982823"/>
+            <a:off x="133350" y="133348"/>
+            <a:ext cx="1645920" cy="1060704"/>
           </a:xfrm>
           <a:prstGeom prst="roundRect">
             <a:avLst>
@@ -8290,8 +8290,8 @@
         </p:nvSpPr>
         <p:spPr>
           <a:xfrm>
-            <a:off x="76200" y="1249680"/>
-            <a:ext cx="12039600" cy="779145"/>
+            <a:off x="76200" y="1316197"/>
+            <a:ext cx="12039600" cy="712628"/>
           </a:xfrm>
           <a:prstGeom prst="roundRect">
             <a:avLst>
@@ -8330,8 +8330,8 @@
         </p:nvSpPr>
         <p:spPr>
           <a:xfrm>
-            <a:off x="133350" y="1320085"/>
-            <a:ext cx="1645920" cy="640080"/>
+            <a:off x="133350" y="1376072"/>
+            <a:ext cx="1645920" cy="594360"/>
           </a:xfrm>
           <a:prstGeom prst="roundRect">
             <a:avLst>
@@ -9203,8 +9203,8 @@
         </p:nvSpPr>
         <p:spPr>
           <a:xfrm>
-            <a:off x="2388870" y="184461"/>
-            <a:ext cx="2468880" cy="285750"/>
+            <a:off x="2388870" y="147895"/>
+            <a:ext cx="2468880" cy="365760"/>
           </a:xfrm>
           <a:prstGeom prst="roundRect">
             <a:avLst>
@@ -9274,7 +9274,7 @@
         <p:spPr>
           <a:xfrm>
             <a:off x="2388870" y="706694"/>
-            <a:ext cx="2468880" cy="304800"/>
+            <a:ext cx="2468880" cy="365760"/>
           </a:xfrm>
           <a:prstGeom prst="roundRect">
             <a:avLst>
@@ -9304,7 +9304,7 @@
         </p:style>
         <p:txBody>
           <a:bodyPr wrap="square" lIns="76200" tIns="47625" rIns="76200" bIns="47625" anchor="ctr">
-            <a:normAutofit fontScale="92500" lnSpcReduction="10000"/>
+            <a:normAutofit/>
           </a:bodyPr>
           <a:lstStyle/>
           <a:p>
@@ -9348,8 +9348,8 @@
         </p:nvSpPr>
         <p:spPr>
           <a:xfrm>
-            <a:off x="5480475" y="174936"/>
-            <a:ext cx="2468880" cy="304800"/>
+            <a:off x="5480475" y="147895"/>
+            <a:ext cx="2468880" cy="365760"/>
           </a:xfrm>
           <a:prstGeom prst="roundRect">
             <a:avLst>
@@ -9419,7 +9419,7 @@
         <p:spPr>
           <a:xfrm>
             <a:off x="5480475" y="706694"/>
-            <a:ext cx="2468880" cy="304800"/>
+            <a:ext cx="2468880" cy="365760"/>
           </a:xfrm>
           <a:prstGeom prst="roundRect">
             <a:avLst>
@@ -9449,7 +9449,7 @@
         </p:style>
         <p:txBody>
           <a:bodyPr wrap="square" lIns="76200" tIns="47625" rIns="76200" bIns="47625" anchor="ctr">
-            <a:normAutofit lnSpcReduction="10000"/>
+            <a:normAutofit/>
           </a:bodyPr>
           <a:lstStyle/>
           <a:p>
@@ -9493,8 +9493,8 @@
         </p:nvSpPr>
         <p:spPr>
           <a:xfrm>
-            <a:off x="8814161" y="174936"/>
-            <a:ext cx="2468880" cy="304800"/>
+            <a:off x="8814161" y="147895"/>
+            <a:ext cx="2468880" cy="365760"/>
           </a:xfrm>
           <a:prstGeom prst="roundRect">
             <a:avLst>
@@ -9564,7 +9564,7 @@
         <p:spPr>
           <a:xfrm>
             <a:off x="8814161" y="706694"/>
-            <a:ext cx="2468880" cy="304800"/>
+            <a:ext cx="2468880" cy="365760"/>
           </a:xfrm>
           <a:prstGeom prst="roundRect">
             <a:avLst>
@@ -9594,7 +9594,7 @@
         </p:style>
         <p:txBody>
           <a:bodyPr wrap="square" lIns="76200" tIns="47625" rIns="76200" bIns="47625" anchor="ctr">
-            <a:normAutofit lnSpcReduction="10000"/>
+            <a:normAutofit/>
           </a:bodyPr>
           <a:lstStyle/>
           <a:p>
@@ -9638,7 +9638,7 @@
         </p:nvSpPr>
         <p:spPr>
           <a:xfrm>
-            <a:off x="7557428" y="1400174"/>
+            <a:off x="7557428" y="1459150"/>
             <a:ext cx="2035045" cy="361950"/>
           </a:xfrm>
           <a:prstGeom prst="roundRect">
@@ -9721,7 +9721,7 @@
         </p:nvSpPr>
         <p:spPr>
           <a:xfrm>
-            <a:off x="9704750" y="1404938"/>
+            <a:off x="9704750" y="1459150"/>
             <a:ext cx="2103118" cy="361950"/>
           </a:xfrm>
           <a:prstGeom prst="roundRect">
@@ -9915,7 +9915,7 @@
         </p:nvSpPr>
         <p:spPr>
           <a:xfrm>
-            <a:off x="7280542" y="2219324"/>
+            <a:off x="7317866" y="2219324"/>
             <a:ext cx="3074668" cy="590549"/>
           </a:xfrm>
           <a:prstGeom prst="roundRect">
@@ -9923,7 +9923,7 @@
               <a:gd name="adj" fmla="val 14000"/>
             </a:avLst>
           </a:prstGeom>
-          <a:ln/>
+          <a:ln w="19050"/>
         </p:spPr>
         <p:style>
           <a:lnRef idx="2">
@@ -10803,8 +10803,8 @@
         </p:nvCxnSpPr>
         <p:spPr>
           <a:xfrm>
-            <a:off x="3623310" y="470211"/>
-            <a:ext cx="0" cy="236483"/>
+            <a:off x="3623310" y="513655"/>
+            <a:ext cx="0" cy="193039"/>
           </a:xfrm>
           <a:prstGeom prst="straightConnector1">
             <a:avLst/>
@@ -10841,8 +10841,8 @@
         </p:nvCxnSpPr>
         <p:spPr>
           <a:xfrm>
-            <a:off x="6714915" y="479736"/>
-            <a:ext cx="0" cy="226958"/>
+            <a:off x="6714915" y="513655"/>
+            <a:ext cx="0" cy="193039"/>
           </a:xfrm>
           <a:prstGeom prst="straightConnector1">
             <a:avLst/>
@@ -10879,8 +10879,8 @@
         </p:nvCxnSpPr>
         <p:spPr>
           <a:xfrm>
-            <a:off x="10048601" y="479736"/>
-            <a:ext cx="0" cy="226958"/>
+            <a:off x="10048601" y="513655"/>
+            <a:ext cx="0" cy="193039"/>
           </a:xfrm>
           <a:prstGeom prst="straightConnector1">
             <a:avLst/>
@@ -10918,7 +10918,7 @@
         <p:spPr>
           <a:xfrm flipH="1">
             <a:off x="6947126" y="2514599"/>
-            <a:ext cx="333416" cy="1"/>
+            <a:ext cx="370740" cy="1"/>
           </a:xfrm>
           <a:prstGeom prst="straightConnector1">
             <a:avLst/>
@@ -11212,8 +11212,8 @@
         </p:nvCxnSpPr>
         <p:spPr>
           <a:xfrm>
-            <a:off x="10756309" y="1766888"/>
-            <a:ext cx="1" cy="3376612"/>
+            <a:off x="10756309" y="1821100"/>
+            <a:ext cx="1" cy="3322400"/>
           </a:xfrm>
           <a:prstGeom prst="straightConnector1">
             <a:avLst/>
@@ -11412,8 +11412,8 @@
         </p:nvCxnSpPr>
         <p:spPr>
           <a:xfrm>
-            <a:off x="4497501" y="1181100"/>
-            <a:ext cx="0" cy="1038225"/>
+            <a:off x="4497501" y="1248243"/>
+            <a:ext cx="0" cy="971082"/>
           </a:xfrm>
           <a:prstGeom prst="straightConnector1">
             <a:avLst/>
@@ -11466,7 +11466,7 @@
         </p:blipFill>
         <p:spPr>
           <a:xfrm>
-            <a:off x="2003016" y="167316"/>
+            <a:off x="2003016" y="168833"/>
             <a:ext cx="323884" cy="323884"/>
           </a:xfrm>
           <a:prstGeom prst="rect">
@@ -11502,7 +11502,7 @@
         </p:blipFill>
         <p:spPr>
           <a:xfrm>
-            <a:off x="5116682" y="167316"/>
+            <a:off x="5116682" y="170755"/>
             <a:ext cx="320040" cy="320040"/>
           </a:xfrm>
           <a:prstGeom prst="rect">
@@ -11538,7 +11538,7 @@
         </p:blipFill>
         <p:spPr>
           <a:xfrm>
-            <a:off x="8434787" y="167316"/>
+            <a:off x="8434787" y="170755"/>
             <a:ext cx="320040" cy="320040"/>
           </a:xfrm>
           <a:prstGeom prst="rect">
@@ -12112,7 +12112,7 @@
         </p:blipFill>
         <p:spPr>
           <a:xfrm>
-            <a:off x="9717429" y="1445806"/>
+            <a:off x="9717429" y="1502965"/>
             <a:ext cx="274320" cy="274320"/>
           </a:xfrm>
           <a:prstGeom prst="rect">
@@ -12136,7 +12136,7 @@
         </p:nvCxnSpPr>
         <p:spPr>
           <a:xfrm>
-            <a:off x="142681" y="1182926"/>
+            <a:off x="142681" y="1238912"/>
             <a:ext cx="11887200" cy="0"/>
           </a:xfrm>
           <a:prstGeom prst="line">
@@ -12176,7 +12176,7 @@
         </p:nvSpPr>
         <p:spPr>
           <a:xfrm>
-            <a:off x="10640300" y="1073759"/>
+            <a:off x="10640300" y="1129745"/>
             <a:ext cx="232017" cy="274320"/>
           </a:xfrm>
           <a:prstGeom prst="downArrow">
@@ -12235,7 +12235,7 @@
         </p:nvSpPr>
         <p:spPr>
           <a:xfrm>
-            <a:off x="8458941" y="1073759"/>
+            <a:off x="8458941" y="1129745"/>
             <a:ext cx="232017" cy="274320"/>
           </a:xfrm>
           <a:prstGeom prst="downArrow">
@@ -12297,8 +12297,8 @@
         </p:nvCxnSpPr>
         <p:spPr>
           <a:xfrm>
-            <a:off x="8574951" y="1762124"/>
-            <a:ext cx="0" cy="314326"/>
+            <a:off x="8574951" y="1821100"/>
+            <a:ext cx="0" cy="255350"/>
           </a:xfrm>
           <a:prstGeom prst="straightConnector1">
             <a:avLst/>
@@ -12351,7 +12351,7 @@
         </p:blipFill>
         <p:spPr>
           <a:xfrm>
-            <a:off x="7600305" y="1385798"/>
+            <a:off x="7600305" y="1457245"/>
             <a:ext cx="365760" cy="365760"/>
           </a:xfrm>
           <a:prstGeom prst="rect">

--- a/docs/CleanArchitecture-Execution-Flow.pptx
+++ b/docs/CleanArchitecture-Execution-Flow.pptx
@@ -8,7 +8,7 @@
     <p:notesMasterId r:id="rId3"/>
   </p:notesMasterIdLst>
   <p:sldIdLst>
-    <p:sldId id="256" r:id="rId2"/>
+    <p:sldId id="261" r:id="rId2"/>
   </p:sldIdLst>
   <p:sldSz cx="12192000" cy="6858000"/>
   <p:notesSz cx="6858000" cy="9144000"/>
@@ -291,7 +291,13 @@
   <p:cSld>
     <p:spTree>
       <p:nvGrpSpPr>
-        <p:cNvPr id="1" name=""/>
+        <p:cNvPr id="1" name="">
+          <a:extLst>
+            <a:ext uri="{FF2B5EF4-FFF2-40B4-BE49-F238E27FC236}">
+              <a16:creationId xmlns:a16="http://schemas.microsoft.com/office/drawing/2014/main" id="{38A1EF7C-82D0-0FBB-C76E-823027398067}"/>
+            </a:ext>
+          </a:extLst>
+        </p:cNvPr>
         <p:cNvGrpSpPr/>
         <p:nvPr/>
       </p:nvGrpSpPr>
@@ -305,7 +311,13 @@
       </p:grpSpPr>
       <p:sp>
         <p:nvSpPr>
-          <p:cNvPr id="2" name="Slide Image Placeholder 1"/>
+          <p:cNvPr id="2" name="Slide Image Placeholder 1">
+            <a:extLst>
+              <a:ext uri="{FF2B5EF4-FFF2-40B4-BE49-F238E27FC236}">
+                <a16:creationId xmlns:a16="http://schemas.microsoft.com/office/drawing/2014/main" id="{463574FA-7838-49AF-7B43-DF24FA7CBCB1}"/>
+              </a:ext>
+            </a:extLst>
+          </p:cNvPr>
           <p:cNvSpPr>
             <a:spLocks noGrp="1" noRot="1" noChangeAspect="1"/>
           </p:cNvSpPr>
@@ -324,7 +336,13 @@
       </p:sp>
       <p:sp>
         <p:nvSpPr>
-          <p:cNvPr id="3" name="Notes Placeholder 2"/>
+          <p:cNvPr id="3" name="Notes Placeholder 2">
+            <a:extLst>
+              <a:ext uri="{FF2B5EF4-FFF2-40B4-BE49-F238E27FC236}">
+                <a16:creationId xmlns:a16="http://schemas.microsoft.com/office/drawing/2014/main" id="{A174975E-6B56-130E-926D-A7C66E4400D3}"/>
+              </a:ext>
+            </a:extLst>
+          </p:cNvPr>
           <p:cNvSpPr>
             <a:spLocks noGrp="1"/>
           </p:cNvSpPr>
@@ -346,7 +364,13 @@
       </p:sp>
       <p:sp>
         <p:nvSpPr>
-          <p:cNvPr id="4" name="Slide Number Placeholder 3"/>
+          <p:cNvPr id="4" name="Slide Number Placeholder 3">
+            <a:extLst>
+              <a:ext uri="{FF2B5EF4-FFF2-40B4-BE49-F238E27FC236}">
+                <a16:creationId xmlns:a16="http://schemas.microsoft.com/office/drawing/2014/main" id="{57EDD9F3-F6DF-8FD4-5ED2-49A45E78DF66}"/>
+              </a:ext>
+            </a:extLst>
+          </p:cNvPr>
           <p:cNvSpPr>
             <a:spLocks noGrp="1"/>
           </p:cNvSpPr>
@@ -364,6 +388,11 @@
         </p:txBody>
       </p:sp>
     </p:spTree>
+    <p:extLst>
+      <p:ext uri="{BB962C8B-B14F-4D97-AF65-F5344CB8AC3E}">
+        <p14:creationId xmlns:p14="http://schemas.microsoft.com/office/powerpoint/2010/main" val="3413498859"/>
+      </p:ext>
+    </p:extLst>
   </p:cSld>
   <p:clrMapOvr>
     <a:masterClrMapping/>
@@ -8085,17 +8114,15 @@
 <file path=ppt/slides/slide1.xml><?xml version="1.0" encoding="utf-8"?>
 <p:sld xmlns:a="http://schemas.openxmlformats.org/drawingml/2006/main" xmlns:r="http://schemas.openxmlformats.org/officeDocument/2006/relationships" xmlns:p="http://schemas.openxmlformats.org/presentationml/2006/main">
   <p:cSld>
-    <p:bg>
-      <p:bgPr>
-        <a:solidFill>
-          <a:srgbClr val="FFFFFF"/>
-        </a:solidFill>
-        <a:effectLst/>
-      </p:bgPr>
-    </p:bg>
     <p:spTree>
       <p:nvGrpSpPr>
-        <p:cNvPr id="1" name=""/>
+        <p:cNvPr id="1" name="">
+          <a:extLst>
+            <a:ext uri="{FF2B5EF4-FFF2-40B4-BE49-F238E27FC236}">
+              <a16:creationId xmlns:a16="http://schemas.microsoft.com/office/drawing/2014/main" id="{C95D7973-173A-7066-8E53-37FBD96DD550}"/>
+            </a:ext>
+          </a:extLst>
+        </p:cNvPr>
         <p:cNvGrpSpPr/>
         <p:nvPr/>
       </p:nvGrpSpPr>
@@ -8112,7 +8139,7 @@
           <p:cNvPr id="60" name="entry-background">
             <a:extLst>
               <a:ext uri="{FF2B5EF4-FFF2-40B4-BE49-F238E27FC236}">
-                <a16:creationId xmlns:a16="http://schemas.microsoft.com/office/drawing/2014/main" id="{52E00407-B3C3-41A2-A727-CEA33C1B8176}"/>
+                <a16:creationId xmlns:a16="http://schemas.microsoft.com/office/drawing/2014/main" id="{0236E687-54FF-9FE4-8D0F-74638F367CD8}"/>
               </a:ext>
             </a:extLst>
           </p:cNvPr>
@@ -8152,7 +8179,7 @@
           <p:cNvPr id="2" name="entry-label">
             <a:extLst>
               <a:ext uri="{FF2B5EF4-FFF2-40B4-BE49-F238E27FC236}">
-                <a16:creationId xmlns:a16="http://schemas.microsoft.com/office/drawing/2014/main" id="{8E05F228-76CD-4FF3-895B-F321C9908617}"/>
+                <a16:creationId xmlns:a16="http://schemas.microsoft.com/office/drawing/2014/main" id="{5B76DBE8-FCB6-839A-2534-6BAD27AC3F66}"/>
               </a:ext>
             </a:extLst>
           </p:cNvPr>
@@ -8279,7 +8306,7 @@
           <p:cNvPr id="3" name="cross-module-background">
             <a:extLst>
               <a:ext uri="{FF2B5EF4-FFF2-40B4-BE49-F238E27FC236}">
-                <a16:creationId xmlns:a16="http://schemas.microsoft.com/office/drawing/2014/main" id="{27D376F0-468A-4C0D-BEF6-F17ED3711C71}"/>
+                <a16:creationId xmlns:a16="http://schemas.microsoft.com/office/drawing/2014/main" id="{C42344CD-F475-C4B6-F2D3-2581A6E7D3BC}"/>
               </a:ext>
             </a:extLst>
           </p:cNvPr>
@@ -8310,7 +8337,7 @@
           <a:bodyPr/>
           <a:lstStyle/>
           <a:p>
-            <a:endParaRPr lang="en-US"/>
+            <a:endParaRPr lang="en-US" dirty="0"/>
           </a:p>
         </p:txBody>
       </p:sp>
@@ -8319,7 +8346,7 @@
           <p:cNvPr id="4" name="cross-module-label">
             <a:extLst>
               <a:ext uri="{FF2B5EF4-FFF2-40B4-BE49-F238E27FC236}">
-                <a16:creationId xmlns:a16="http://schemas.microsoft.com/office/drawing/2014/main" id="{2F148C0B-0EF9-45CA-A45F-FE47B0743C8D}"/>
+                <a16:creationId xmlns:a16="http://schemas.microsoft.com/office/drawing/2014/main" id="{821AAB5F-EC38-7BE9-11B4-C49CD2489091}"/>
               </a:ext>
             </a:extLst>
           </p:cNvPr>
@@ -8446,7 +8473,7 @@
           <p:cNvPr id="5" name="module-entry-background">
             <a:extLst>
               <a:ext uri="{FF2B5EF4-FFF2-40B4-BE49-F238E27FC236}">
-                <a16:creationId xmlns:a16="http://schemas.microsoft.com/office/drawing/2014/main" id="{68AA3853-8CDC-458F-A875-79D324A987E9}"/>
+                <a16:creationId xmlns:a16="http://schemas.microsoft.com/office/drawing/2014/main" id="{45A862C6-9C38-29C3-BE19-7507C39523A7}"/>
               </a:ext>
             </a:extLst>
           </p:cNvPr>
@@ -8486,7 +8513,7 @@
           <p:cNvPr id="6" name="module-entry-label">
             <a:extLst>
               <a:ext uri="{FF2B5EF4-FFF2-40B4-BE49-F238E27FC236}">
-                <a16:creationId xmlns:a16="http://schemas.microsoft.com/office/drawing/2014/main" id="{2BCDE13D-E99A-4BA1-9F17-EAA8868800E8}"/>
+                <a16:creationId xmlns:a16="http://schemas.microsoft.com/office/drawing/2014/main" id="{D8F6E0E4-98E8-B6E2-4830-9454FD494EB8}"/>
               </a:ext>
             </a:extLst>
           </p:cNvPr>
@@ -8582,7 +8609,7 @@
           <p:cNvPr id="7" name="handlers-background">
             <a:extLst>
               <a:ext uri="{FF2B5EF4-FFF2-40B4-BE49-F238E27FC236}">
-                <a16:creationId xmlns:a16="http://schemas.microsoft.com/office/drawing/2014/main" id="{C233B837-025B-492D-AC8D-16AF52062079}"/>
+                <a16:creationId xmlns:a16="http://schemas.microsoft.com/office/drawing/2014/main" id="{B172F68D-53AE-75C3-F0A6-4C378AB6A58A}"/>
               </a:ext>
             </a:extLst>
           </p:cNvPr>
@@ -8622,7 +8649,7 @@
           <p:cNvPr id="8" name="handlers-label">
             <a:extLst>
               <a:ext uri="{FF2B5EF4-FFF2-40B4-BE49-F238E27FC236}">
-                <a16:creationId xmlns:a16="http://schemas.microsoft.com/office/drawing/2014/main" id="{5AE66684-5277-4AB6-BCE7-B95E00923E86}"/>
+                <a16:creationId xmlns:a16="http://schemas.microsoft.com/office/drawing/2014/main" id="{36BF52D4-E2E9-D67C-9725-5192A05DA8BD}"/>
               </a:ext>
             </a:extLst>
           </p:cNvPr>
@@ -8749,7 +8776,7 @@
           <p:cNvPr id="9" name="processing-background">
             <a:extLst>
               <a:ext uri="{FF2B5EF4-FFF2-40B4-BE49-F238E27FC236}">
-                <a16:creationId xmlns:a16="http://schemas.microsoft.com/office/drawing/2014/main" id="{CD282A39-0EB5-4471-8CF7-9C848973B593}"/>
+                <a16:creationId xmlns:a16="http://schemas.microsoft.com/office/drawing/2014/main" id="{D066B1B7-D1BF-8568-080B-49F04E0FA0A4}"/>
               </a:ext>
             </a:extLst>
           </p:cNvPr>
@@ -8789,7 +8816,7 @@
           <p:cNvPr id="10" name="processing-label">
             <a:extLst>
               <a:ext uri="{FF2B5EF4-FFF2-40B4-BE49-F238E27FC236}">
-                <a16:creationId xmlns:a16="http://schemas.microsoft.com/office/drawing/2014/main" id="{964795D3-3544-456C-8723-87247141304A}"/>
+                <a16:creationId xmlns:a16="http://schemas.microsoft.com/office/drawing/2014/main" id="{2B4BAA61-9D62-5845-DAAE-F675AA71F15F}"/>
               </a:ext>
             </a:extLst>
           </p:cNvPr>
@@ -8885,7 +8912,7 @@
           <p:cNvPr id="11" name="infrastructure-background">
             <a:extLst>
               <a:ext uri="{FF2B5EF4-FFF2-40B4-BE49-F238E27FC236}">
-                <a16:creationId xmlns:a16="http://schemas.microsoft.com/office/drawing/2014/main" id="{7C73DBD2-1643-46AF-B4BC-60B6595241A5}"/>
+                <a16:creationId xmlns:a16="http://schemas.microsoft.com/office/drawing/2014/main" id="{C110E919-8599-8E41-2D7B-DDFAB32FA229}"/>
               </a:ext>
             </a:extLst>
           </p:cNvPr>
@@ -8927,7 +8954,7 @@
           <p:cNvPr id="12" name="infrastructure-label">
             <a:extLst>
               <a:ext uri="{FF2B5EF4-FFF2-40B4-BE49-F238E27FC236}">
-                <a16:creationId xmlns:a16="http://schemas.microsoft.com/office/drawing/2014/main" id="{CCC383B6-48A7-4C88-9A52-2B093724FC41}"/>
+                <a16:creationId xmlns:a16="http://schemas.microsoft.com/office/drawing/2014/main" id="{FC806BDE-5E06-43E2-C4DA-92C4C51F9E67}"/>
               </a:ext>
             </a:extLst>
           </p:cNvPr>
@@ -9023,7 +9050,7 @@
           <p:cNvPr id="13" name="technologies-background">
             <a:extLst>
               <a:ext uri="{FF2B5EF4-FFF2-40B4-BE49-F238E27FC236}">
-                <a16:creationId xmlns:a16="http://schemas.microsoft.com/office/drawing/2014/main" id="{E395C0B5-8C61-41D5-B8FB-280478749187}"/>
+                <a16:creationId xmlns:a16="http://schemas.microsoft.com/office/drawing/2014/main" id="{EF24E0C5-ED6F-E9A5-24AC-7CDCDFBBBD50}"/>
               </a:ext>
             </a:extLst>
           </p:cNvPr>
@@ -9065,7 +9092,7 @@
           <p:cNvPr id="14" name="technologies-label">
             <a:extLst>
               <a:ext uri="{FF2B5EF4-FFF2-40B4-BE49-F238E27FC236}">
-                <a16:creationId xmlns:a16="http://schemas.microsoft.com/office/drawing/2014/main" id="{02677F20-5A7A-41A8-8974-746444FB7F75}"/>
+                <a16:creationId xmlns:a16="http://schemas.microsoft.com/office/drawing/2014/main" id="{E007C51D-1A48-680B-B02D-F635A52C7A9D}"/>
               </a:ext>
             </a:extLst>
           </p:cNvPr>
@@ -9192,7 +9219,7 @@
           <p:cNvPr id="15" name="web-api">
             <a:extLst>
               <a:ext uri="{FF2B5EF4-FFF2-40B4-BE49-F238E27FC236}">
-                <a16:creationId xmlns:a16="http://schemas.microsoft.com/office/drawing/2014/main" id="{7F235520-FFE0-41F6-BEF7-9F400A76FBBE}"/>
+                <a16:creationId xmlns:a16="http://schemas.microsoft.com/office/drawing/2014/main" id="{35157C4E-7DC2-9140-903A-F9281EE7CA3F}"/>
               </a:ext>
             </a:extLst>
           </p:cNvPr>
@@ -9203,7 +9230,7 @@
         </p:nvSpPr>
         <p:spPr>
           <a:xfrm>
-            <a:off x="2388870" y="147895"/>
+            <a:off x="2388870" y="194550"/>
             <a:ext cx="2468880" cy="365760"/>
           </a:xfrm>
           <a:prstGeom prst="roundRect">
@@ -9262,7 +9289,7 @@
           <p:cNvPr id="16" name="http-endpoints">
             <a:extLst>
               <a:ext uri="{FF2B5EF4-FFF2-40B4-BE49-F238E27FC236}">
-                <a16:creationId xmlns:a16="http://schemas.microsoft.com/office/drawing/2014/main" id="{A9BAC379-5A44-4B6D-B972-B96841D41073}"/>
+                <a16:creationId xmlns:a16="http://schemas.microsoft.com/office/drawing/2014/main" id="{33B2BAAD-18EF-4544-38E1-2589278D296F}"/>
               </a:ext>
             </a:extLst>
           </p:cNvPr>
@@ -9273,7 +9300,7 @@
         </p:nvSpPr>
         <p:spPr>
           <a:xfrm>
-            <a:off x="2388870" y="706694"/>
+            <a:off x="2388870" y="753349"/>
             <a:ext cx="2468880" cy="365760"/>
           </a:xfrm>
           <a:prstGeom prst="roundRect">
@@ -9337,7 +9364,7 @@
           <p:cNvPr id="17" name="scheduling-host">
             <a:extLst>
               <a:ext uri="{FF2B5EF4-FFF2-40B4-BE49-F238E27FC236}">
-                <a16:creationId xmlns:a16="http://schemas.microsoft.com/office/drawing/2014/main" id="{17A5C804-C5B8-4E46-B596-BBD1F8AC98D8}"/>
+                <a16:creationId xmlns:a16="http://schemas.microsoft.com/office/drawing/2014/main" id="{007DF890-D80E-00BC-6EB6-6D85DE6B314D}"/>
               </a:ext>
             </a:extLst>
           </p:cNvPr>
@@ -9348,7 +9375,7 @@
         </p:nvSpPr>
         <p:spPr>
           <a:xfrm>
-            <a:off x="5480475" y="147895"/>
+            <a:off x="5480475" y="194550"/>
             <a:ext cx="2468880" cy="365760"/>
           </a:xfrm>
           <a:prstGeom prst="roundRect">
@@ -9407,7 +9434,7 @@
           <p:cNvPr id="18" name="scheduled-job-adapter">
             <a:extLst>
               <a:ext uri="{FF2B5EF4-FFF2-40B4-BE49-F238E27FC236}">
-                <a16:creationId xmlns:a16="http://schemas.microsoft.com/office/drawing/2014/main" id="{DAF77CCB-CBC3-42B5-BD64-8E50D7E0A711}"/>
+                <a16:creationId xmlns:a16="http://schemas.microsoft.com/office/drawing/2014/main" id="{147FA63B-B997-6EF3-A289-A32BDBAEB684}"/>
               </a:ext>
             </a:extLst>
           </p:cNvPr>
@@ -9418,7 +9445,7 @@
         </p:nvSpPr>
         <p:spPr>
           <a:xfrm>
-            <a:off x="5480475" y="706694"/>
+            <a:off x="5480475" y="753349"/>
             <a:ext cx="2468880" cy="365760"/>
           </a:xfrm>
           <a:prstGeom prst="roundRect">
@@ -9482,7 +9509,7 @@
           <p:cNvPr id="19" name="messaging-host">
             <a:extLst>
               <a:ext uri="{FF2B5EF4-FFF2-40B4-BE49-F238E27FC236}">
-                <a16:creationId xmlns:a16="http://schemas.microsoft.com/office/drawing/2014/main" id="{0E510C88-D28C-42E9-856D-BAB13E154143}"/>
+                <a16:creationId xmlns:a16="http://schemas.microsoft.com/office/drawing/2014/main" id="{4FB8A6C4-CBC2-BE73-D38E-45C6E4DECA4F}"/>
               </a:ext>
             </a:extLst>
           </p:cNvPr>
@@ -9493,7 +9520,7 @@
         </p:nvSpPr>
         <p:spPr>
           <a:xfrm>
-            <a:off x="8814161" y="147895"/>
+            <a:off x="8814161" y="194550"/>
             <a:ext cx="2468880" cy="365760"/>
           </a:xfrm>
           <a:prstGeom prst="roundRect">
@@ -9552,7 +9579,7 @@
           <p:cNvPr id="20" name="subscriber-consumer">
             <a:extLst>
               <a:ext uri="{FF2B5EF4-FFF2-40B4-BE49-F238E27FC236}">
-                <a16:creationId xmlns:a16="http://schemas.microsoft.com/office/drawing/2014/main" id="{70810611-41EB-4A71-84D6-7DB094D338D6}"/>
+                <a16:creationId xmlns:a16="http://schemas.microsoft.com/office/drawing/2014/main" id="{27F0B786-BBC1-1A72-FA2D-24F710A73FB9}"/>
               </a:ext>
             </a:extLst>
           </p:cNvPr>
@@ -9563,7 +9590,7 @@
         </p:nvSpPr>
         <p:spPr>
           <a:xfrm>
-            <a:off x="8814161" y="706694"/>
+            <a:off x="8814161" y="753349"/>
             <a:ext cx="2468880" cy="365760"/>
           </a:xfrm>
           <a:prstGeom prst="roundRect">
@@ -9627,7 +9654,7 @@
           <p:cNvPr id="22" name="process-manager">
             <a:extLst>
               <a:ext uri="{FF2B5EF4-FFF2-40B4-BE49-F238E27FC236}">
-                <a16:creationId xmlns:a16="http://schemas.microsoft.com/office/drawing/2014/main" id="{EBC60600-BBA5-42CD-BF6F-333F0B20C32C}"/>
+                <a16:creationId xmlns:a16="http://schemas.microsoft.com/office/drawing/2014/main" id="{D4D0DA93-6E49-40C1-D13C-DDE47CB53B37}"/>
               </a:ext>
             </a:extLst>
           </p:cNvPr>
@@ -9638,7 +9665,7 @@
         </p:nvSpPr>
         <p:spPr>
           <a:xfrm>
-            <a:off x="7557428" y="1459150"/>
+            <a:off x="4912081" y="1457988"/>
             <a:ext cx="2035045" cy="361950"/>
           </a:xfrm>
           <a:prstGeom prst="roundRect">
@@ -9710,7 +9737,7 @@
           <p:cNvPr id="23" name="cross-module-querying">
             <a:extLst>
               <a:ext uri="{FF2B5EF4-FFF2-40B4-BE49-F238E27FC236}">
-                <a16:creationId xmlns:a16="http://schemas.microsoft.com/office/drawing/2014/main" id="{35CDE637-C2E2-4550-884B-AFC05726C5F9}"/>
+                <a16:creationId xmlns:a16="http://schemas.microsoft.com/office/drawing/2014/main" id="{0F6A08BA-0347-BF3D-6B16-704E5BA4C736}"/>
               </a:ext>
             </a:extLst>
           </p:cNvPr>
@@ -9793,7 +9820,7 @@
           <p:cNvPr id="24" name="module-runtime">
             <a:extLst>
               <a:ext uri="{FF2B5EF4-FFF2-40B4-BE49-F238E27FC236}">
-                <a16:creationId xmlns:a16="http://schemas.microsoft.com/office/drawing/2014/main" id="{6FD94DB6-EF14-448E-97F2-9B67F9ECED9A}"/>
+                <a16:creationId xmlns:a16="http://schemas.microsoft.com/office/drawing/2014/main" id="{34470EA4-DFD7-8580-FA5A-3FFA9AF59337}"/>
               </a:ext>
             </a:extLst>
           </p:cNvPr>
@@ -9904,7 +9931,7 @@
           <p:cNvPr id="25" name="cross-cutting-middleware">
             <a:extLst>
               <a:ext uri="{FF2B5EF4-FFF2-40B4-BE49-F238E27FC236}">
-                <a16:creationId xmlns:a16="http://schemas.microsoft.com/office/drawing/2014/main" id="{21EC98FA-49CD-4254-BD04-331452CDD865}"/>
+                <a16:creationId xmlns:a16="http://schemas.microsoft.com/office/drawing/2014/main" id="{E2FB6333-DC70-1765-60F8-A746BE7A6781}"/>
               </a:ext>
             </a:extLst>
           </p:cNvPr>
@@ -9997,7 +10024,7 @@
           <p:cNvPr id="26" name="command-handler">
             <a:extLst>
               <a:ext uri="{FF2B5EF4-FFF2-40B4-BE49-F238E27FC236}">
-                <a16:creationId xmlns:a16="http://schemas.microsoft.com/office/drawing/2014/main" id="{17FF54EF-C4F3-4B8A-8438-12CE444DF79C}"/>
+                <a16:creationId xmlns:a16="http://schemas.microsoft.com/office/drawing/2014/main" id="{7284689C-7F02-F075-B676-09E3218DB506}"/>
               </a:ext>
             </a:extLst>
           </p:cNvPr>
@@ -10050,7 +10077,7 @@
           <p:cNvPr id="27" name="query-handler">
             <a:extLst>
               <a:ext uri="{FF2B5EF4-FFF2-40B4-BE49-F238E27FC236}">
-                <a16:creationId xmlns:a16="http://schemas.microsoft.com/office/drawing/2014/main" id="{CBBE642A-89FE-47B7-A892-EE0EC71A20F7}"/>
+                <a16:creationId xmlns:a16="http://schemas.microsoft.com/office/drawing/2014/main" id="{D052B661-E120-1088-2166-70F2EA019A8C}"/>
               </a:ext>
             </a:extLst>
           </p:cNvPr>
@@ -10103,7 +10130,7 @@
           <p:cNvPr id="28" name="domain-services">
             <a:extLst>
               <a:ext uri="{FF2B5EF4-FFF2-40B4-BE49-F238E27FC236}">
-                <a16:creationId xmlns:a16="http://schemas.microsoft.com/office/drawing/2014/main" id="{B3A55665-474C-4EAA-9EBE-D47407D1A461}"/>
+                <a16:creationId xmlns:a16="http://schemas.microsoft.com/office/drawing/2014/main" id="{30F43679-A8CA-D933-BF43-E768E29F79EC}"/>
               </a:ext>
             </a:extLst>
           </p:cNvPr>
@@ -10156,7 +10183,7 @@
           <p:cNvPr id="29" name="domain-model">
             <a:extLst>
               <a:ext uri="{FF2B5EF4-FFF2-40B4-BE49-F238E27FC236}">
-                <a16:creationId xmlns:a16="http://schemas.microsoft.com/office/drawing/2014/main" id="{CDCA25C0-A04F-45D4-AEAA-A314A5D3A477}"/>
+                <a16:creationId xmlns:a16="http://schemas.microsoft.com/office/drawing/2014/main" id="{478244AD-A4B3-7595-D580-FF88C335BEAF}"/>
               </a:ext>
             </a:extLst>
           </p:cNvPr>
@@ -10209,7 +10236,7 @@
           <p:cNvPr id="30" name="query-data-access">
             <a:extLst>
               <a:ext uri="{FF2B5EF4-FFF2-40B4-BE49-F238E27FC236}">
-                <a16:creationId xmlns:a16="http://schemas.microsoft.com/office/drawing/2014/main" id="{EA547D78-9FA0-49DE-8E94-CB75D38FA0B6}"/>
+                <a16:creationId xmlns:a16="http://schemas.microsoft.com/office/drawing/2014/main" id="{B0F11077-6DB1-50DF-75B3-FC34FB4B5F8C}"/>
               </a:ext>
             </a:extLst>
           </p:cNvPr>
@@ -10262,7 +10289,7 @@
           <p:cNvPr id="31" name="repositories-dbcontext">
             <a:extLst>
               <a:ext uri="{FF2B5EF4-FFF2-40B4-BE49-F238E27FC236}">
-                <a16:creationId xmlns:a16="http://schemas.microsoft.com/office/drawing/2014/main" id="{2890D938-A1B7-4763-80B3-7596B3CB0AC1}"/>
+                <a16:creationId xmlns:a16="http://schemas.microsoft.com/office/drawing/2014/main" id="{24C2E041-CBA2-B337-1AC3-C9B0AA8D7B9E}"/>
               </a:ext>
             </a:extLst>
           </p:cNvPr>
@@ -10324,7 +10351,7 @@
           <p:cNvPr id="32" name="read-infrastructure">
             <a:extLst>
               <a:ext uri="{FF2B5EF4-FFF2-40B4-BE49-F238E27FC236}">
-                <a16:creationId xmlns:a16="http://schemas.microsoft.com/office/drawing/2014/main" id="{A7FAD6BE-1825-4771-A3D5-C5706EE3A27B}"/>
+                <a16:creationId xmlns:a16="http://schemas.microsoft.com/office/drawing/2014/main" id="{16EC8CCE-1460-7731-68AB-DB6AF6D8091A}"/>
               </a:ext>
             </a:extLst>
           </p:cNvPr>
@@ -10388,7 +10415,7 @@
           <p:cNvPr id="34" name="integration-event-adapters">
             <a:extLst>
               <a:ext uri="{FF2B5EF4-FFF2-40B4-BE49-F238E27FC236}">
-                <a16:creationId xmlns:a16="http://schemas.microsoft.com/office/drawing/2014/main" id="{DBF3D221-B51C-41DC-8570-76F609C0B2D0}"/>
+                <a16:creationId xmlns:a16="http://schemas.microsoft.com/office/drawing/2014/main" id="{7CB97C82-E5A1-0A81-9F53-30B2B2E2ECE5}"/>
               </a:ext>
             </a:extLst>
           </p:cNvPr>
@@ -10475,7 +10502,7 @@
           <p:cNvPr id="35" name="cross-module-read-store">
             <a:extLst>
               <a:ext uri="{FF2B5EF4-FFF2-40B4-BE49-F238E27FC236}">
-                <a16:creationId xmlns:a16="http://schemas.microsoft.com/office/drawing/2014/main" id="{76EC0818-15E8-4F85-A617-7FA57B36900F}"/>
+                <a16:creationId xmlns:a16="http://schemas.microsoft.com/office/drawing/2014/main" id="{B586B77E-1BF0-22C9-B6BF-8948C2A82872}"/>
               </a:ext>
             </a:extLst>
           </p:cNvPr>
@@ -10540,7 +10567,7 @@
           <p:cNvPr id="36" name="framework">
             <a:extLst>
               <a:ext uri="{FF2B5EF4-FFF2-40B4-BE49-F238E27FC236}">
-                <a16:creationId xmlns:a16="http://schemas.microsoft.com/office/drawing/2014/main" id="{BD706E17-411D-4CAF-8E38-02C41ED58D78}"/>
+                <a16:creationId xmlns:a16="http://schemas.microsoft.com/office/drawing/2014/main" id="{6A5ACBD6-B357-30C1-83EE-A1D74903F923}"/>
               </a:ext>
             </a:extLst>
           </p:cNvPr>
@@ -10604,7 +10631,7 @@
           <p:cNvPr id="37" name="ef-sql">
             <a:extLst>
               <a:ext uri="{FF2B5EF4-FFF2-40B4-BE49-F238E27FC236}">
-                <a16:creationId xmlns:a16="http://schemas.microsoft.com/office/drawing/2014/main" id="{3A4EBCCA-4ED7-446B-801F-BD62559ECD29}"/>
+                <a16:creationId xmlns:a16="http://schemas.microsoft.com/office/drawing/2014/main" id="{DB06DBE3-5E5B-A1E7-17F1-982D1F10F814}"/>
               </a:ext>
             </a:extLst>
           </p:cNvPr>
@@ -10668,7 +10695,7 @@
           <p:cNvPr id="38" name="messaging-technology">
             <a:extLst>
               <a:ext uri="{FF2B5EF4-FFF2-40B4-BE49-F238E27FC236}">
-                <a16:creationId xmlns:a16="http://schemas.microsoft.com/office/drawing/2014/main" id="{4533E63F-77E9-4857-96C1-3501A431C2DE}"/>
+                <a16:creationId xmlns:a16="http://schemas.microsoft.com/office/drawing/2014/main" id="{BF063B26-86CB-88C8-D650-5DBE28C7A35E}"/>
               </a:ext>
             </a:extLst>
           </p:cNvPr>
@@ -10732,7 +10759,7 @@
           <p:cNvPr id="39" name="scheduling-technology">
             <a:extLst>
               <a:ext uri="{FF2B5EF4-FFF2-40B4-BE49-F238E27FC236}">
-                <a16:creationId xmlns:a16="http://schemas.microsoft.com/office/drawing/2014/main" id="{39700F15-98E8-426B-A27C-411112313A89}"/>
+                <a16:creationId xmlns:a16="http://schemas.microsoft.com/office/drawing/2014/main" id="{3769B262-BC57-D1CF-D418-A96AECA78EB9}"/>
               </a:ext>
             </a:extLst>
           </p:cNvPr>
@@ -10793,7 +10820,13 @@
       </p:sp>
       <p:cxnSp>
         <p:nvCxnSpPr>
-          <p:cNvPr id="99" name="web-to-http"/>
+          <p:cNvPr id="99" name="web-to-http">
+            <a:extLst>
+              <a:ext uri="{FF2B5EF4-FFF2-40B4-BE49-F238E27FC236}">
+                <a16:creationId xmlns:a16="http://schemas.microsoft.com/office/drawing/2014/main" id="{FDE91D97-F6F0-A6D2-5A2B-86881862E5EF}"/>
+              </a:ext>
+            </a:extLst>
+          </p:cNvPr>
           <p:cNvCxnSpPr>
             <a:cxnSpLocks/>
             <a:stCxn id="15" idx="2"/>
@@ -10803,7 +10836,7 @@
         </p:nvCxnSpPr>
         <p:spPr>
           <a:xfrm>
-            <a:off x="3623310" y="513655"/>
+            <a:off x="3623310" y="560310"/>
             <a:ext cx="0" cy="193039"/>
           </a:xfrm>
           <a:prstGeom prst="straightConnector1">
@@ -10831,7 +10864,13 @@
       </p:cxnSp>
       <p:cxnSp>
         <p:nvCxnSpPr>
-          <p:cNvPr id="100" name="scheduling-to-job"/>
+          <p:cNvPr id="100" name="scheduling-to-job">
+            <a:extLst>
+              <a:ext uri="{FF2B5EF4-FFF2-40B4-BE49-F238E27FC236}">
+                <a16:creationId xmlns:a16="http://schemas.microsoft.com/office/drawing/2014/main" id="{FDD9B379-5380-E1C7-1E0F-EFB069DCD5B2}"/>
+              </a:ext>
+            </a:extLst>
+          </p:cNvPr>
           <p:cNvCxnSpPr>
             <a:cxnSpLocks/>
             <a:stCxn id="17" idx="2"/>
@@ -10841,7 +10880,7 @@
         </p:nvCxnSpPr>
         <p:spPr>
           <a:xfrm>
-            <a:off x="6714915" y="513655"/>
+            <a:off x="6714915" y="560310"/>
             <a:ext cx="0" cy="193039"/>
           </a:xfrm>
           <a:prstGeom prst="straightConnector1">
@@ -10869,7 +10908,13 @@
       </p:cxnSp>
       <p:cxnSp>
         <p:nvCxnSpPr>
-          <p:cNvPr id="101" name="messaging-to-consumer"/>
+          <p:cNvPr id="101" name="messaging-to-consumer">
+            <a:extLst>
+              <a:ext uri="{FF2B5EF4-FFF2-40B4-BE49-F238E27FC236}">
+                <a16:creationId xmlns:a16="http://schemas.microsoft.com/office/drawing/2014/main" id="{4FB1B9F0-E0A6-0A44-98B0-D6E8915A2533}"/>
+              </a:ext>
+            </a:extLst>
+          </p:cNvPr>
           <p:cNvCxnSpPr>
             <a:cxnSpLocks/>
             <a:stCxn id="19" idx="2"/>
@@ -10879,7 +10924,7 @@
         </p:nvCxnSpPr>
         <p:spPr>
           <a:xfrm>
-            <a:off x="10048601" y="513655"/>
+            <a:off x="10048601" y="560310"/>
             <a:ext cx="0" cy="193039"/>
           </a:xfrm>
           <a:prstGeom prst="straightConnector1">
@@ -10907,7 +10952,13 @@
       </p:cxnSp>
       <p:cxnSp>
         <p:nvCxnSpPr>
-          <p:cNvPr id="106" name="middleware-wraps-runtime"/>
+          <p:cNvPr id="106" name="middleware-wraps-runtime">
+            <a:extLst>
+              <a:ext uri="{FF2B5EF4-FFF2-40B4-BE49-F238E27FC236}">
+                <a16:creationId xmlns:a16="http://schemas.microsoft.com/office/drawing/2014/main" id="{EF370894-9E83-AF21-0939-890286E8BF55}"/>
+              </a:ext>
+            </a:extLst>
+          </p:cNvPr>
           <p:cNvCxnSpPr>
             <a:cxnSpLocks/>
             <a:stCxn id="25" idx="1"/>
@@ -10935,7 +10986,13 @@
       </p:cxnSp>
       <p:cxnSp>
         <p:nvCxnSpPr>
-          <p:cNvPr id="107" name="runtime-to-command"/>
+          <p:cNvPr id="107" name="runtime-to-command">
+            <a:extLst>
+              <a:ext uri="{FF2B5EF4-FFF2-40B4-BE49-F238E27FC236}">
+                <a16:creationId xmlns:a16="http://schemas.microsoft.com/office/drawing/2014/main" id="{E48CAEBC-A614-3AC8-7DC6-DDE90BC76D98}"/>
+              </a:ext>
+            </a:extLst>
+          </p:cNvPr>
           <p:cNvCxnSpPr>
             <a:cxnSpLocks/>
             <a:stCxn id="24" idx="2"/>
@@ -10975,7 +11032,13 @@
       </p:cxnSp>
       <p:cxnSp>
         <p:nvCxnSpPr>
-          <p:cNvPr id="108" name="runtime-to-query"/>
+          <p:cNvPr id="108" name="runtime-to-query">
+            <a:extLst>
+              <a:ext uri="{FF2B5EF4-FFF2-40B4-BE49-F238E27FC236}">
+                <a16:creationId xmlns:a16="http://schemas.microsoft.com/office/drawing/2014/main" id="{127319B9-F754-412A-10E9-7FC03C8002F9}"/>
+              </a:ext>
+            </a:extLst>
+          </p:cNvPr>
           <p:cNvCxnSpPr>
             <a:cxnSpLocks/>
             <a:stCxn id="24" idx="2"/>
@@ -11015,7 +11078,13 @@
       </p:cxnSp>
       <p:cxnSp>
         <p:nvCxnSpPr>
-          <p:cNvPr id="109" name="command-to-domain-services"/>
+          <p:cNvPr id="109" name="command-to-domain-services">
+            <a:extLst>
+              <a:ext uri="{FF2B5EF4-FFF2-40B4-BE49-F238E27FC236}">
+                <a16:creationId xmlns:a16="http://schemas.microsoft.com/office/drawing/2014/main" id="{87DC8FF5-809E-6406-D62B-9B0B34723A4E}"/>
+              </a:ext>
+            </a:extLst>
+          </p:cNvPr>
           <p:cNvCxnSpPr>
             <a:stCxn id="26" idx="2"/>
             <a:endCxn id="28" idx="0"/>
@@ -11052,7 +11121,13 @@
       </p:cxnSp>
       <p:cxnSp>
         <p:nvCxnSpPr>
-          <p:cNvPr id="110" name="domain-services-to-domain"/>
+          <p:cNvPr id="110" name="domain-services-to-domain">
+            <a:extLst>
+              <a:ext uri="{FF2B5EF4-FFF2-40B4-BE49-F238E27FC236}">
+                <a16:creationId xmlns:a16="http://schemas.microsoft.com/office/drawing/2014/main" id="{19274D6C-1430-73F1-F0CB-54565C95A207}"/>
+              </a:ext>
+            </a:extLst>
+          </p:cNvPr>
           <p:cNvCxnSpPr>
             <a:stCxn id="28" idx="2"/>
             <a:endCxn id="29" idx="0"/>
@@ -11089,7 +11164,13 @@
       </p:cxnSp>
       <p:cxnSp>
         <p:nvCxnSpPr>
-          <p:cNvPr id="111" name="domain-to-persistence"/>
+          <p:cNvPr id="111" name="domain-to-persistence">
+            <a:extLst>
+              <a:ext uri="{FF2B5EF4-FFF2-40B4-BE49-F238E27FC236}">
+                <a16:creationId xmlns:a16="http://schemas.microsoft.com/office/drawing/2014/main" id="{8D4CF84A-1932-C445-95E0-A08F242B6199}"/>
+              </a:ext>
+            </a:extLst>
+          </p:cNvPr>
           <p:cNvCxnSpPr>
             <a:cxnSpLocks/>
             <a:stCxn id="29" idx="2"/>
@@ -11127,7 +11208,13 @@
       </p:cxnSp>
       <p:cxnSp>
         <p:nvCxnSpPr>
-          <p:cNvPr id="112" name="query-to-access"/>
+          <p:cNvPr id="112" name="query-to-access">
+            <a:extLst>
+              <a:ext uri="{FF2B5EF4-FFF2-40B4-BE49-F238E27FC236}">
+                <a16:creationId xmlns:a16="http://schemas.microsoft.com/office/drawing/2014/main" id="{828C3FE5-FDB2-0413-FBFC-4EA92230DCDA}"/>
+              </a:ext>
+            </a:extLst>
+          </p:cNvPr>
           <p:cNvCxnSpPr>
             <a:stCxn id="27" idx="2"/>
             <a:endCxn id="30" idx="0"/>
@@ -11164,7 +11251,13 @@
       </p:cxnSp>
       <p:cxnSp>
         <p:nvCxnSpPr>
-          <p:cNvPr id="113" name="query-access-to-read-infra"/>
+          <p:cNvPr id="113" name="query-access-to-read-infra">
+            <a:extLst>
+              <a:ext uri="{FF2B5EF4-FFF2-40B4-BE49-F238E27FC236}">
+                <a16:creationId xmlns:a16="http://schemas.microsoft.com/office/drawing/2014/main" id="{E9BD6753-048B-FB46-766A-8809EED7B144}"/>
+              </a:ext>
+            </a:extLst>
+          </p:cNvPr>
           <p:cNvCxnSpPr>
             <a:cxnSpLocks/>
             <a:stCxn id="30" idx="2"/>
@@ -11202,7 +11295,13 @@
       </p:cxnSp>
       <p:cxnSp>
         <p:nvCxnSpPr>
-          <p:cNvPr id="114" name="cross-querying-to-store"/>
+          <p:cNvPr id="114" name="cross-querying-to-store">
+            <a:extLst>
+              <a:ext uri="{FF2B5EF4-FFF2-40B4-BE49-F238E27FC236}">
+                <a16:creationId xmlns:a16="http://schemas.microsoft.com/office/drawing/2014/main" id="{51F82168-782D-8D0E-F1BC-C06A3F0C645B}"/>
+              </a:ext>
+            </a:extLst>
+          </p:cNvPr>
           <p:cNvCxnSpPr>
             <a:cxnSpLocks/>
             <a:stCxn id="23" idx="2"/>
@@ -11248,7 +11347,7 @@
           <p:cNvPr id="56" name="framework-boundary-guide">
             <a:extLst>
               <a:ext uri="{FF2B5EF4-FFF2-40B4-BE49-F238E27FC236}">
-                <a16:creationId xmlns:a16="http://schemas.microsoft.com/office/drawing/2014/main" id="{B0BAFEE4-D12A-4BCF-873E-AB9E0B45FB98}"/>
+                <a16:creationId xmlns:a16="http://schemas.microsoft.com/office/drawing/2014/main" id="{005F1452-BB69-EF56-DD0C-79B196614806}"/>
               </a:ext>
             </a:extLst>
           </p:cNvPr>
@@ -11286,7 +11385,7 @@
           <p:cNvPr id="57" name="ef-boundary-guide">
             <a:extLst>
               <a:ext uri="{FF2B5EF4-FFF2-40B4-BE49-F238E27FC236}">
-                <a16:creationId xmlns:a16="http://schemas.microsoft.com/office/drawing/2014/main" id="{117CB7DC-B310-4C1A-A989-11103F501E81}"/>
+                <a16:creationId xmlns:a16="http://schemas.microsoft.com/office/drawing/2014/main" id="{A538748F-4189-2319-03D1-866CA6C819E6}"/>
               </a:ext>
             </a:extLst>
           </p:cNvPr>
@@ -11324,7 +11423,7 @@
           <p:cNvPr id="58" name="messaging-boundary-guide">
             <a:extLst>
               <a:ext uri="{FF2B5EF4-FFF2-40B4-BE49-F238E27FC236}">
-                <a16:creationId xmlns:a16="http://schemas.microsoft.com/office/drawing/2014/main" id="{D3CB2370-3280-4F95-B6D7-D0D1796456AC}"/>
+                <a16:creationId xmlns:a16="http://schemas.microsoft.com/office/drawing/2014/main" id="{378CC8C4-C1F4-7962-A08D-567B0D9D9026}"/>
               </a:ext>
             </a:extLst>
           </p:cNvPr>
@@ -11362,7 +11461,7 @@
           <p:cNvPr id="59" name="scheduling-boundary-guide">
             <a:extLst>
               <a:ext uri="{FF2B5EF4-FFF2-40B4-BE49-F238E27FC236}">
-                <a16:creationId xmlns:a16="http://schemas.microsoft.com/office/drawing/2014/main" id="{A860ADAA-3475-4331-A09F-0D9039C3CC76}"/>
+                <a16:creationId xmlns:a16="http://schemas.microsoft.com/office/drawing/2014/main" id="{E60F0160-31DD-8E4F-789E-CC91C58057AB}"/>
               </a:ext>
             </a:extLst>
           </p:cNvPr>
@@ -11400,7 +11499,7 @@
           <p:cNvPr id="123" name="job-optional-process-manager">
             <a:extLst>
               <a:ext uri="{FF2B5EF4-FFF2-40B4-BE49-F238E27FC236}">
-                <a16:creationId xmlns:a16="http://schemas.microsoft.com/office/drawing/2014/main" id="{6105B187-8559-9161-AC77-221A99B13ECE}"/>
+                <a16:creationId xmlns:a16="http://schemas.microsoft.com/office/drawing/2014/main" id="{2E135E00-60D2-62E3-56AB-9E57014A8754}"/>
               </a:ext>
             </a:extLst>
           </p:cNvPr>
@@ -11443,7 +11542,7 @@
           <p:cNvPr id="132" name="Graphic 131" descr="Internet with solid fill">
             <a:extLst>
               <a:ext uri="{FF2B5EF4-FFF2-40B4-BE49-F238E27FC236}">
-                <a16:creationId xmlns:a16="http://schemas.microsoft.com/office/drawing/2014/main" id="{394CCD1D-CE47-2EE1-2149-7620B1776F4F}"/>
+                <a16:creationId xmlns:a16="http://schemas.microsoft.com/office/drawing/2014/main" id="{326DE3E0-198D-697F-5CF2-3233BBAD6F22}"/>
               </a:ext>
             </a:extLst>
           </p:cNvPr>
@@ -11466,7 +11565,7 @@
         </p:blipFill>
         <p:spPr>
           <a:xfrm>
-            <a:off x="2003016" y="168833"/>
+            <a:off x="2003016" y="215488"/>
             <a:ext cx="323884" cy="323884"/>
           </a:xfrm>
           <a:prstGeom prst="rect">
@@ -11479,7 +11578,7 @@
           <p:cNvPr id="136" name="Graphic 135" descr="Clock with solid fill">
             <a:extLst>
               <a:ext uri="{FF2B5EF4-FFF2-40B4-BE49-F238E27FC236}">
-                <a16:creationId xmlns:a16="http://schemas.microsoft.com/office/drawing/2014/main" id="{DC314665-866A-C4B9-3BC4-478B9BC42B04}"/>
+                <a16:creationId xmlns:a16="http://schemas.microsoft.com/office/drawing/2014/main" id="{1C7E586B-4057-BAE3-0021-0BD8D8575B43}"/>
               </a:ext>
             </a:extLst>
           </p:cNvPr>
@@ -11502,7 +11601,7 @@
         </p:blipFill>
         <p:spPr>
           <a:xfrm>
-            <a:off x="5116682" y="170755"/>
+            <a:off x="5116682" y="217410"/>
             <a:ext cx="320040" cy="320040"/>
           </a:xfrm>
           <a:prstGeom prst="rect">
@@ -11515,7 +11614,7 @@
           <p:cNvPr id="144" name="Graphic 143" descr="Envelope with solid fill">
             <a:extLst>
               <a:ext uri="{FF2B5EF4-FFF2-40B4-BE49-F238E27FC236}">
-                <a16:creationId xmlns:a16="http://schemas.microsoft.com/office/drawing/2014/main" id="{FD5E8AAA-6F80-DB80-5275-2022A12735FF}"/>
+                <a16:creationId xmlns:a16="http://schemas.microsoft.com/office/drawing/2014/main" id="{FDBB02C0-D2A5-2852-E512-E74E904C823B}"/>
               </a:ext>
             </a:extLst>
           </p:cNvPr>
@@ -11538,7 +11637,7 @@
         </p:blipFill>
         <p:spPr>
           <a:xfrm>
-            <a:off x="8434787" y="170755"/>
+            <a:off x="8434787" y="217410"/>
             <a:ext cx="320040" cy="320040"/>
           </a:xfrm>
           <a:prstGeom prst="rect">
@@ -11551,7 +11650,7 @@
           <p:cNvPr id="157" name="Graphic 156" descr="Database with solid fill">
             <a:extLst>
               <a:ext uri="{FF2B5EF4-FFF2-40B4-BE49-F238E27FC236}">
-                <a16:creationId xmlns:a16="http://schemas.microsoft.com/office/drawing/2014/main" id="{26DB0196-0C76-DF6E-8940-D5338BDC80F5}"/>
+                <a16:creationId xmlns:a16="http://schemas.microsoft.com/office/drawing/2014/main" id="{12B6BDB3-D674-DB75-928A-130F4C6676AE}"/>
               </a:ext>
             </a:extLst>
           </p:cNvPr>
@@ -11587,7 +11686,7 @@
           <p:cNvPr id="159" name="Graphic 158" descr="Gears with solid fill">
             <a:extLst>
               <a:ext uri="{FF2B5EF4-FFF2-40B4-BE49-F238E27FC236}">
-                <a16:creationId xmlns:a16="http://schemas.microsoft.com/office/drawing/2014/main" id="{680D0717-5A6A-AA62-49B3-68A04D2007F7}"/>
+                <a16:creationId xmlns:a16="http://schemas.microsoft.com/office/drawing/2014/main" id="{D20D6FDF-95B8-7E00-0C4F-15202534FF41}"/>
               </a:ext>
             </a:extLst>
           </p:cNvPr>
@@ -11623,7 +11722,7 @@
           <p:cNvPr id="179" name="Graphic 178" descr="Database with solid fill">
             <a:extLst>
               <a:ext uri="{FF2B5EF4-FFF2-40B4-BE49-F238E27FC236}">
-                <a16:creationId xmlns:a16="http://schemas.microsoft.com/office/drawing/2014/main" id="{38B4BF67-0713-2C19-6EBA-20EF2D227D1D}"/>
+                <a16:creationId xmlns:a16="http://schemas.microsoft.com/office/drawing/2014/main" id="{5DFF71DE-FBCD-2813-E957-541D3535BE86}"/>
               </a:ext>
             </a:extLst>
           </p:cNvPr>
@@ -11659,7 +11758,7 @@
           <p:cNvPr id="241" name="Group 240">
             <a:extLst>
               <a:ext uri="{FF2B5EF4-FFF2-40B4-BE49-F238E27FC236}">
-                <a16:creationId xmlns:a16="http://schemas.microsoft.com/office/drawing/2014/main" id="{7A26D6F0-F557-A0B9-7719-026FED0CE5E6}"/>
+                <a16:creationId xmlns:a16="http://schemas.microsoft.com/office/drawing/2014/main" id="{00100681-B8F0-D8BE-F580-6CAE8A54CD00}"/>
               </a:ext>
             </a:extLst>
           </p:cNvPr>
@@ -11679,7 +11778,7 @@
             <p:cNvPr id="181" name="Graphic 180" descr="Gauge with solid fill">
               <a:extLst>
                 <a:ext uri="{FF2B5EF4-FFF2-40B4-BE49-F238E27FC236}">
-                  <a16:creationId xmlns:a16="http://schemas.microsoft.com/office/drawing/2014/main" id="{E0FBD8AB-DBC4-6975-05C9-056179355516}"/>
+                  <a16:creationId xmlns:a16="http://schemas.microsoft.com/office/drawing/2014/main" id="{7BE74D9F-26DC-C832-3B55-74AC975D58C4}"/>
                 </a:ext>
               </a:extLst>
             </p:cNvPr>
@@ -11715,7 +11814,7 @@
             <p:cNvPr id="183" name="Graphic 182" descr="Heartbeat with solid fill">
               <a:extLst>
                 <a:ext uri="{FF2B5EF4-FFF2-40B4-BE49-F238E27FC236}">
-                  <a16:creationId xmlns:a16="http://schemas.microsoft.com/office/drawing/2014/main" id="{046430D2-6381-258A-111E-F5E3DB9D21DF}"/>
+                  <a16:creationId xmlns:a16="http://schemas.microsoft.com/office/drawing/2014/main" id="{D078A188-2015-0F63-CCE6-7A76A143D711}"/>
                 </a:ext>
               </a:extLst>
             </p:cNvPr>
@@ -11751,7 +11850,7 @@
             <p:cNvPr id="185" name="Graphic 184" descr="Lock with solid fill">
               <a:extLst>
                 <a:ext uri="{FF2B5EF4-FFF2-40B4-BE49-F238E27FC236}">
-                  <a16:creationId xmlns:a16="http://schemas.microsoft.com/office/drawing/2014/main" id="{6E769858-3379-8B82-D22B-F67E5D0BE42D}"/>
+                  <a16:creationId xmlns:a16="http://schemas.microsoft.com/office/drawing/2014/main" id="{980F81EC-45B9-2337-62AB-CF878CED2590}"/>
                 </a:ext>
               </a:extLst>
             </p:cNvPr>
@@ -11788,7 +11887,7 @@
           <p:cNvPr id="192" name="cross-querying-to-store">
             <a:extLst>
               <a:ext uri="{FF2B5EF4-FFF2-40B4-BE49-F238E27FC236}">
-                <a16:creationId xmlns:a16="http://schemas.microsoft.com/office/drawing/2014/main" id="{B4E8B7A7-3208-EBA6-EA9E-A59F43E0EA7E}"/>
+                <a16:creationId xmlns:a16="http://schemas.microsoft.com/office/drawing/2014/main" id="{011C9EF7-5D1E-C107-2C8A-8D14B6AD0C82}"/>
               </a:ext>
             </a:extLst>
           </p:cNvPr>
@@ -11837,7 +11936,7 @@
           <p:cNvPr id="203" name="Graphic 202" descr="Network with solid fill">
             <a:extLst>
               <a:ext uri="{FF2B5EF4-FFF2-40B4-BE49-F238E27FC236}">
-                <a16:creationId xmlns:a16="http://schemas.microsoft.com/office/drawing/2014/main" id="{3F9AEA83-1BB3-95C5-0592-A65B22899213}"/>
+                <a16:creationId xmlns:a16="http://schemas.microsoft.com/office/drawing/2014/main" id="{8F26F7EC-96A6-F158-4440-D36C3BC77D62}"/>
               </a:ext>
             </a:extLst>
           </p:cNvPr>
@@ -11873,7 +11972,7 @@
           <p:cNvPr id="205" name="Graphic 204" descr="Single gear with solid fill">
             <a:extLst>
               <a:ext uri="{FF2B5EF4-FFF2-40B4-BE49-F238E27FC236}">
-                <a16:creationId xmlns:a16="http://schemas.microsoft.com/office/drawing/2014/main" id="{00BCBC3C-C22E-4F66-C66D-67C8E3966EDB}"/>
+                <a16:creationId xmlns:a16="http://schemas.microsoft.com/office/drawing/2014/main" id="{D261DFDE-3845-BE54-5C8A-F91BC8BC023B}"/>
               </a:ext>
             </a:extLst>
           </p:cNvPr>
@@ -11909,7 +12008,7 @@
           <p:cNvPr id="207" name="Graphic 206" descr="Database with solid fill">
             <a:extLst>
               <a:ext uri="{FF2B5EF4-FFF2-40B4-BE49-F238E27FC236}">
-                <a16:creationId xmlns:a16="http://schemas.microsoft.com/office/drawing/2014/main" id="{FA3F84C3-D262-BBED-E983-C8385DEF67DA}"/>
+                <a16:creationId xmlns:a16="http://schemas.microsoft.com/office/drawing/2014/main" id="{65898162-584B-65A4-C745-E9009A1C0ADF}"/>
               </a:ext>
             </a:extLst>
           </p:cNvPr>
@@ -11945,7 +12044,7 @@
           <p:cNvPr id="212" name="Graphic 211" descr="Braille with solid fill">
             <a:extLst>
               <a:ext uri="{FF2B5EF4-FFF2-40B4-BE49-F238E27FC236}">
-                <a16:creationId xmlns:a16="http://schemas.microsoft.com/office/drawing/2014/main" id="{23D2F8C9-CA95-1EA1-5A0D-CBDB407D3003}"/>
+                <a16:creationId xmlns:a16="http://schemas.microsoft.com/office/drawing/2014/main" id="{7C6EAF71-4899-7256-E003-1D61E27DB8D0}"/>
               </a:ext>
             </a:extLst>
           </p:cNvPr>
@@ -11981,7 +12080,7 @@
           <p:cNvPr id="214" name="Graphic 213" descr="Atom with solid fill">
             <a:extLst>
               <a:ext uri="{FF2B5EF4-FFF2-40B4-BE49-F238E27FC236}">
-                <a16:creationId xmlns:a16="http://schemas.microsoft.com/office/drawing/2014/main" id="{B22359AC-1F8D-1283-DC4A-DFEE73257623}"/>
+                <a16:creationId xmlns:a16="http://schemas.microsoft.com/office/drawing/2014/main" id="{84C7AFE3-C296-1FEC-D7C8-0A64873FE744}"/>
               </a:ext>
             </a:extLst>
           </p:cNvPr>
@@ -12017,7 +12116,7 @@
           <p:cNvPr id="216" name="Graphic 215" descr="Pie chart with solid fill">
             <a:extLst>
               <a:ext uri="{FF2B5EF4-FFF2-40B4-BE49-F238E27FC236}">
-                <a16:creationId xmlns:a16="http://schemas.microsoft.com/office/drawing/2014/main" id="{33355504-CDF3-7E6C-E912-E5F3B2EB6F40}"/>
+                <a16:creationId xmlns:a16="http://schemas.microsoft.com/office/drawing/2014/main" id="{0D7CA592-04D1-B1FB-B298-AC4E539D3D18}"/>
               </a:ext>
             </a:extLst>
           </p:cNvPr>
@@ -12053,7 +12152,7 @@
           <p:cNvPr id="218" name="Graphic 217" descr="Research with solid fill">
             <a:extLst>
               <a:ext uri="{FF2B5EF4-FFF2-40B4-BE49-F238E27FC236}">
-                <a16:creationId xmlns:a16="http://schemas.microsoft.com/office/drawing/2014/main" id="{74958BAD-F3C4-58B4-295B-9CC59FBF8BBA}"/>
+                <a16:creationId xmlns:a16="http://schemas.microsoft.com/office/drawing/2014/main" id="{FF487AD8-BBAD-EAEA-09B7-D54150FA9973}"/>
               </a:ext>
             </a:extLst>
           </p:cNvPr>
@@ -12089,7 +12188,7 @@
           <p:cNvPr id="260" name="Graphic 259" descr="Database with solid fill">
             <a:extLst>
               <a:ext uri="{FF2B5EF4-FFF2-40B4-BE49-F238E27FC236}">
-                <a16:creationId xmlns:a16="http://schemas.microsoft.com/office/drawing/2014/main" id="{E0B98A1F-03CC-0DDF-86EB-A42E61BA759F}"/>
+                <a16:creationId xmlns:a16="http://schemas.microsoft.com/office/drawing/2014/main" id="{1CE85842-497E-457A-424A-8FB1BCE8D764}"/>
               </a:ext>
             </a:extLst>
           </p:cNvPr>
@@ -12125,7 +12224,7 @@
           <p:cNvPr id="268" name="Straight Connector 267">
             <a:extLst>
               <a:ext uri="{FF2B5EF4-FFF2-40B4-BE49-F238E27FC236}">
-                <a16:creationId xmlns:a16="http://schemas.microsoft.com/office/drawing/2014/main" id="{C4BECEEA-9993-4C50-4AA2-5B1160576CB6}"/>
+                <a16:creationId xmlns:a16="http://schemas.microsoft.com/office/drawing/2014/main" id="{CB7E7479-046C-5EF9-3EE9-19E22AE88D89}"/>
               </a:ext>
             </a:extLst>
           </p:cNvPr>
@@ -12145,167 +12244,6 @@
           <a:ln w="28575">
             <a:headEnd type="none" w="med" len="med"/>
             <a:tailEnd type="none" w="med" len="med"/>
-          </a:ln>
-        </p:spPr>
-        <p:style>
-          <a:lnRef idx="3">
-            <a:schemeClr val="accent6"/>
-          </a:lnRef>
-          <a:fillRef idx="0">
-            <a:schemeClr val="accent6"/>
-          </a:fillRef>
-          <a:effectRef idx="2">
-            <a:schemeClr val="accent6"/>
-          </a:effectRef>
-          <a:fontRef idx="minor">
-            <a:schemeClr val="tx1"/>
-          </a:fontRef>
-        </p:style>
-      </p:cxnSp>
-      <p:sp>
-        <p:nvSpPr>
-          <p:cNvPr id="246" name="Arrow: Down 245">
-            <a:extLst>
-              <a:ext uri="{FF2B5EF4-FFF2-40B4-BE49-F238E27FC236}">
-                <a16:creationId xmlns:a16="http://schemas.microsoft.com/office/drawing/2014/main" id="{02346D27-5DE4-D0EA-A296-564DEBB9DCD8}"/>
-              </a:ext>
-            </a:extLst>
-          </p:cNvPr>
-          <p:cNvSpPr/>
-          <p:nvPr/>
-        </p:nvSpPr>
-        <p:spPr>
-          <a:xfrm>
-            <a:off x="10640300" y="1129745"/>
-            <a:ext cx="232017" cy="274320"/>
-          </a:xfrm>
-          <a:prstGeom prst="downArrow">
-            <a:avLst/>
-          </a:prstGeom>
-          <a:solidFill>
-            <a:schemeClr val="bg1"/>
-          </a:solidFill>
-          <a:ln w="19050">
-            <a:solidFill>
-              <a:schemeClr val="accent1"/>
-            </a:solidFill>
-          </a:ln>
-          <a:effectLst>
-            <a:outerShdw blurRad="50800" dist="38100" dir="5400000" algn="t" rotWithShape="0">
-              <a:prstClr val="black">
-                <a:alpha val="40000"/>
-              </a:prstClr>
-            </a:outerShdw>
-          </a:effectLst>
-        </p:spPr>
-        <p:style>
-          <a:lnRef idx="0">
-            <a:scrgbClr r="0" g="0" b="0"/>
-          </a:lnRef>
-          <a:fillRef idx="0">
-            <a:scrgbClr r="0" g="0" b="0"/>
-          </a:fillRef>
-          <a:effectRef idx="0">
-            <a:scrgbClr r="0" g="0" b="0"/>
-          </a:effectRef>
-          <a:fontRef idx="minor">
-            <a:schemeClr val="lt1"/>
-          </a:fontRef>
-        </p:style>
-        <p:txBody>
-          <a:bodyPr rtlCol="0" anchor="ctr"/>
-          <a:lstStyle/>
-          <a:p>
-            <a:pPr algn="ctr"/>
-            <a:endParaRPr lang="en-US"/>
-          </a:p>
-        </p:txBody>
-      </p:sp>
-      <p:sp>
-        <p:nvSpPr>
-          <p:cNvPr id="248" name="Arrow: Down 247">
-            <a:extLst>
-              <a:ext uri="{FF2B5EF4-FFF2-40B4-BE49-F238E27FC236}">
-                <a16:creationId xmlns:a16="http://schemas.microsoft.com/office/drawing/2014/main" id="{73036C02-8EAB-F01F-8E72-C873D2EDFD1D}"/>
-              </a:ext>
-            </a:extLst>
-          </p:cNvPr>
-          <p:cNvSpPr/>
-          <p:nvPr/>
-        </p:nvSpPr>
-        <p:spPr>
-          <a:xfrm>
-            <a:off x="8458941" y="1129745"/>
-            <a:ext cx="232017" cy="274320"/>
-          </a:xfrm>
-          <a:prstGeom prst="downArrow">
-            <a:avLst/>
-          </a:prstGeom>
-          <a:solidFill>
-            <a:schemeClr val="bg1"/>
-          </a:solidFill>
-          <a:ln w="19050">
-            <a:solidFill>
-              <a:schemeClr val="accent1"/>
-            </a:solidFill>
-          </a:ln>
-          <a:effectLst>
-            <a:outerShdw blurRad="50800" dist="38100" dir="5400000" algn="t" rotWithShape="0">
-              <a:prstClr val="black">
-                <a:alpha val="40000"/>
-              </a:prstClr>
-            </a:outerShdw>
-          </a:effectLst>
-        </p:spPr>
-        <p:style>
-          <a:lnRef idx="0">
-            <a:scrgbClr r="0" g="0" b="0"/>
-          </a:lnRef>
-          <a:fillRef idx="0">
-            <a:scrgbClr r="0" g="0" b="0"/>
-          </a:fillRef>
-          <a:effectRef idx="0">
-            <a:scrgbClr r="0" g="0" b="0"/>
-          </a:effectRef>
-          <a:fontRef idx="minor">
-            <a:schemeClr val="lt1"/>
-          </a:fontRef>
-        </p:style>
-        <p:txBody>
-          <a:bodyPr rtlCol="0" anchor="ctr"/>
-          <a:lstStyle/>
-          <a:p>
-            <a:pPr algn="ctr"/>
-            <a:endParaRPr lang="en-US"/>
-          </a:p>
-        </p:txBody>
-      </p:sp>
-      <p:cxnSp>
-        <p:nvCxnSpPr>
-          <p:cNvPr id="273" name="job-optional-process-manager">
-            <a:extLst>
-              <a:ext uri="{FF2B5EF4-FFF2-40B4-BE49-F238E27FC236}">
-                <a16:creationId xmlns:a16="http://schemas.microsoft.com/office/drawing/2014/main" id="{8AC1383E-C298-6E98-8A81-5FFA51D6E8FA}"/>
-              </a:ext>
-            </a:extLst>
-          </p:cNvPr>
-          <p:cNvCxnSpPr>
-            <a:cxnSpLocks/>
-            <a:stCxn id="22" idx="2"/>
-          </p:cNvCxnSpPr>
-          <p:nvPr/>
-        </p:nvCxnSpPr>
-        <p:spPr>
-          <a:xfrm>
-            <a:off x="8574951" y="1821100"/>
-            <a:ext cx="0" cy="255350"/>
-          </a:xfrm>
-          <a:prstGeom prst="straightConnector1">
-            <a:avLst/>
-          </a:prstGeom>
-          <a:ln w="28575">
-            <a:headEnd type="none" w="med" len="med"/>
-            <a:tailEnd type="arrow" w="sm" len="sm"/>
           </a:ln>
         </p:spPr>
         <p:style>
@@ -12328,7 +12266,7 @@
           <p:cNvPr id="277" name="Graphic 276" descr="Venn diagram with solid fill">
             <a:extLst>
               <a:ext uri="{FF2B5EF4-FFF2-40B4-BE49-F238E27FC236}">
-                <a16:creationId xmlns:a16="http://schemas.microsoft.com/office/drawing/2014/main" id="{BFC22193-145D-F674-02F8-717BC3600100}"/>
+                <a16:creationId xmlns:a16="http://schemas.microsoft.com/office/drawing/2014/main" id="{977DA052-3CB6-210D-EDC1-7095A6573564}"/>
               </a:ext>
             </a:extLst>
           </p:cNvPr>
@@ -12351,7 +12289,7 @@
         </p:blipFill>
         <p:spPr>
           <a:xfrm>
-            <a:off x="7600305" y="1457245"/>
+            <a:off x="4954958" y="1456083"/>
             <a:ext cx="365760" cy="365760"/>
           </a:xfrm>
           <a:prstGeom prst="rect">
@@ -12359,10 +12297,139 @@
           </a:prstGeom>
         </p:spPr>
       </p:pic>
+      <p:cxnSp>
+        <p:nvCxnSpPr>
+          <p:cNvPr id="21" name="job-optional-process-manager">
+            <a:extLst>
+              <a:ext uri="{FF2B5EF4-FFF2-40B4-BE49-F238E27FC236}">
+                <a16:creationId xmlns:a16="http://schemas.microsoft.com/office/drawing/2014/main" id="{F6175D5E-FB24-1C92-47DD-D17CB494D7A9}"/>
+              </a:ext>
+            </a:extLst>
+          </p:cNvPr>
+          <p:cNvCxnSpPr>
+            <a:cxnSpLocks/>
+            <a:endCxn id="22" idx="0"/>
+          </p:cNvCxnSpPr>
+          <p:nvPr/>
+        </p:nvCxnSpPr>
+        <p:spPr>
+          <a:xfrm>
+            <a:off x="5929604" y="1246453"/>
+            <a:ext cx="0" cy="211535"/>
+          </a:xfrm>
+          <a:prstGeom prst="straightConnector1">
+            <a:avLst/>
+          </a:prstGeom>
+          <a:ln w="28575">
+            <a:headEnd type="none" w="med" len="med"/>
+            <a:tailEnd type="arrow" w="sm" len="sm"/>
+          </a:ln>
+        </p:spPr>
+        <p:style>
+          <a:lnRef idx="3">
+            <a:schemeClr val="accent6"/>
+          </a:lnRef>
+          <a:fillRef idx="0">
+            <a:schemeClr val="accent6"/>
+          </a:fillRef>
+          <a:effectRef idx="2">
+            <a:schemeClr val="accent6"/>
+          </a:effectRef>
+          <a:fontRef idx="minor">
+            <a:schemeClr val="tx1"/>
+          </a:fontRef>
+        </p:style>
+      </p:cxnSp>
+      <p:cxnSp>
+        <p:nvCxnSpPr>
+          <p:cNvPr id="40" name="job-optional-process-manager">
+            <a:extLst>
+              <a:ext uri="{FF2B5EF4-FFF2-40B4-BE49-F238E27FC236}">
+                <a16:creationId xmlns:a16="http://schemas.microsoft.com/office/drawing/2014/main" id="{84FB5807-4DEE-8DCB-3508-F84628C58998}"/>
+              </a:ext>
+            </a:extLst>
+          </p:cNvPr>
+          <p:cNvCxnSpPr>
+            <a:cxnSpLocks/>
+            <a:endCxn id="23" idx="0"/>
+          </p:cNvCxnSpPr>
+          <p:nvPr/>
+        </p:nvCxnSpPr>
+        <p:spPr>
+          <a:xfrm>
+            <a:off x="10756309" y="1238912"/>
+            <a:ext cx="0" cy="220238"/>
+          </a:xfrm>
+          <a:prstGeom prst="straightConnector1">
+            <a:avLst/>
+          </a:prstGeom>
+          <a:ln w="28575">
+            <a:headEnd type="none" w="med" len="med"/>
+            <a:tailEnd type="arrow" w="sm" len="sm"/>
+          </a:ln>
+        </p:spPr>
+        <p:style>
+          <a:lnRef idx="3">
+            <a:schemeClr val="accent6"/>
+          </a:lnRef>
+          <a:fillRef idx="0">
+            <a:schemeClr val="accent6"/>
+          </a:fillRef>
+          <a:effectRef idx="2">
+            <a:schemeClr val="accent6"/>
+          </a:effectRef>
+          <a:fontRef idx="minor">
+            <a:schemeClr val="tx1"/>
+          </a:fontRef>
+        </p:style>
+      </p:cxnSp>
+      <p:cxnSp>
+        <p:nvCxnSpPr>
+          <p:cNvPr id="41" name="job-optional-process-manager">
+            <a:extLst>
+              <a:ext uri="{FF2B5EF4-FFF2-40B4-BE49-F238E27FC236}">
+                <a16:creationId xmlns:a16="http://schemas.microsoft.com/office/drawing/2014/main" id="{C9908D38-54F0-956D-A6E1-1F00396AD273}"/>
+              </a:ext>
+            </a:extLst>
+          </p:cNvPr>
+          <p:cNvCxnSpPr>
+            <a:cxnSpLocks/>
+            <a:stCxn id="22" idx="2"/>
+          </p:cNvCxnSpPr>
+          <p:nvPr/>
+        </p:nvCxnSpPr>
+        <p:spPr>
+          <a:xfrm>
+            <a:off x="5929604" y="1819938"/>
+            <a:ext cx="0" cy="399386"/>
+          </a:xfrm>
+          <a:prstGeom prst="straightConnector1">
+            <a:avLst/>
+          </a:prstGeom>
+          <a:ln w="28575">
+            <a:headEnd type="none" w="med" len="med"/>
+            <a:tailEnd type="arrow" w="sm" len="sm"/>
+          </a:ln>
+        </p:spPr>
+        <p:style>
+          <a:lnRef idx="3">
+            <a:schemeClr val="accent6"/>
+          </a:lnRef>
+          <a:fillRef idx="0">
+            <a:schemeClr val="accent6"/>
+          </a:fillRef>
+          <a:effectRef idx="2">
+            <a:schemeClr val="accent6"/>
+          </a:effectRef>
+          <a:fontRef idx="minor">
+            <a:schemeClr val="tx1"/>
+          </a:fontRef>
+        </p:style>
+      </p:cxnSp>
     </p:spTree>
     <p:extLst>
       <p:ext uri="{BB962C8B-B14F-4D97-AF65-F5344CB8AC3E}">
-        <p14:creationId xmlns:p14="http://schemas.microsoft.com/office/powerpoint/2010/main" val="1234218276"/>
+        <p14:creationId xmlns:p14="http://schemas.microsoft.com/office/powerpoint/2010/main" val="2139167262"/>
       </p:ext>
     </p:extLst>
   </p:cSld>

--- a/docs/CleanArchitecture-Execution-Flow.pptx
+++ b/docs/CleanArchitecture-Execution-Flow.pptx
@@ -9665,7 +9665,7 @@
         </p:nvSpPr>
         <p:spPr>
           <a:xfrm>
-            <a:off x="4912081" y="1457988"/>
+            <a:off x="4912081" y="1492277"/>
             <a:ext cx="2035045" cy="361950"/>
           </a:xfrm>
           <a:prstGeom prst="roundRect">
@@ -9748,7 +9748,7 @@
         </p:nvSpPr>
         <p:spPr>
           <a:xfrm>
-            <a:off x="9704750" y="1459150"/>
+            <a:off x="9704750" y="1492277"/>
             <a:ext cx="2103118" cy="361950"/>
           </a:xfrm>
           <a:prstGeom prst="roundRect">
@@ -11311,8 +11311,8 @@
         </p:nvCxnSpPr>
         <p:spPr>
           <a:xfrm>
-            <a:off x="10756309" y="1821100"/>
-            <a:ext cx="1" cy="3322400"/>
+            <a:off x="10756309" y="1854227"/>
+            <a:ext cx="1" cy="3289273"/>
           </a:xfrm>
           <a:prstGeom prst="straightConnector1">
             <a:avLst/>
@@ -12211,7 +12211,7 @@
         </p:blipFill>
         <p:spPr>
           <a:xfrm>
-            <a:off x="9717429" y="1502965"/>
+            <a:off x="9717429" y="1536092"/>
             <a:ext cx="274320" cy="274320"/>
           </a:xfrm>
           <a:prstGeom prst="rect">
@@ -12289,7 +12289,7 @@
         </p:blipFill>
         <p:spPr>
           <a:xfrm>
-            <a:off x="4954958" y="1456083"/>
+            <a:off x="4954958" y="1490372"/>
             <a:ext cx="365760" cy="365760"/>
           </a:xfrm>
           <a:prstGeom prst="rect">
@@ -12315,7 +12315,7 @@
         <p:spPr>
           <a:xfrm>
             <a:off x="5929604" y="1246453"/>
-            <a:ext cx="0" cy="211535"/>
+            <a:ext cx="0" cy="245824"/>
           </a:xfrm>
           <a:prstGeom prst="straightConnector1">
             <a:avLst/>
@@ -12358,7 +12358,7 @@
         <p:spPr>
           <a:xfrm>
             <a:off x="10756309" y="1238912"/>
-            <a:ext cx="0" cy="220238"/>
+            <a:ext cx="0" cy="253365"/>
           </a:xfrm>
           <a:prstGeom prst="straightConnector1">
             <a:avLst/>
@@ -12400,8 +12400,8 @@
         </p:nvCxnSpPr>
         <p:spPr>
           <a:xfrm>
-            <a:off x="5929604" y="1819938"/>
-            <a:ext cx="0" cy="399386"/>
+            <a:off x="5929604" y="1854227"/>
+            <a:ext cx="0" cy="365097"/>
           </a:xfrm>
           <a:prstGeom prst="straightConnector1">
             <a:avLst/>
